--- a/Project/Forecasting & Predictive Modeling/HR Attrition - Classification & Survival Analysis/result/slides/Executive_Attrition_Report.pptx
+++ b/Project/Forecasting & Predictive Modeling/HR Attrition - Classification & Survival Analysis/result/slides/Executive_Attrition_Report.pptx
@@ -3116,7 +3116,7 @@
               <a:defRPr sz="2800" b="1"/>
             </a:pPr>
             <a:r>
-              <a:t>Who Will Resign — Key Drivers</a:t>
+              <a:t>Who Will Resign -- Key Drivers</a:t>
             </a:r>
           </a:p>
         </p:txBody>
@@ -3294,7 +3294,7 @@
               <a:defRPr sz="2800" b="1"/>
             </a:pPr>
             <a:r>
-              <a:t>Model Accuracy — Validation</a:t>
+              <a:t>Model Accuracy -- Validation</a:t>
             </a:r>
           </a:p>
         </p:txBody>
@@ -3456,7 +3456,7 @@
               <a:defRPr sz="2800" b="1"/>
             </a:pPr>
             <a:r>
-              <a:t>When Will They Resign — Survival Analysis</a:t>
+              <a:t>When Will They Resign -- Survival Analysis</a:t>
             </a:r>
           </a:p>
         </p:txBody>
